--- a/AUTOSAR_AI_MDE_Hackathon_Demo.pptx
+++ b/AUTOSAR_AI_MDE_Hackathon_Demo.pptx
@@ -17,6 +17,8 @@
     <p:sldId id="265" r:id="rId16"/>
     <p:sldId id="266" r:id="rId17"/>
     <p:sldId id="267" r:id="rId18"/>
+    <p:sldId id="268" r:id="rId19"/>
+    <p:sldId id="269" r:id="rId20"/>
   </p:sldIdLst>
   <p:sldSz cx="12191695" cy="6858000" type="screen4x3"/>
   <p:notesSz cx="6858000" cy="9144000"/>
@@ -3780,7 +3782,137 @@
       </p:sp>
       <p:sp>
         <p:nvSpPr>
-          <p:cNvPr id="10" name="TextBox 9"/>
+          <p:cNvPr id="10" name="Rounded Rectangle 9"/>
+          <p:cNvSpPr/>
+          <p:nvPr/>
+        </p:nvSpPr>
+        <p:spPr>
+          <a:xfrm>
+            <a:off x="868680" y="5440680"/>
+            <a:ext cx="2011680" cy="658368"/>
+          </a:xfrm>
+          <a:prstGeom prst="roundRect">
+            <a:avLst/>
+          </a:prstGeom>
+          <a:solidFill>
+            <a:srgbClr val="0A1522"/>
+          </a:solidFill>
+          <a:ln w="16510">
+            <a:solidFill>
+              <a:srgbClr val="2DE2A8"/>
+            </a:solidFill>
+          </a:ln>
+        </p:spPr>
+        <p:style>
+          <a:lnRef idx="1">
+            <a:schemeClr val="accent1"/>
+          </a:lnRef>
+          <a:fillRef idx="3">
+            <a:schemeClr val="accent1"/>
+          </a:fillRef>
+          <a:effectRef idx="2">
+            <a:schemeClr val="accent1"/>
+          </a:effectRef>
+          <a:fontRef idx="minor">
+            <a:schemeClr val="lt1"/>
+          </a:fontRef>
+        </p:style>
+        <p:txBody>
+          <a:bodyPr rtlCol="0" anchor="ctr" wrap="square"/>
+          <a:lstStyle/>
+          <a:p>
+            <a:pPr algn="ctr"/>
+            <a:r>
+              <a:rPr sz="1200" b="1">
+                <a:solidFill>
+                  <a:srgbClr val="2DE2A8"/>
+                </a:solidFill>
+                <a:latin typeface="Aptos Display"/>
+              </a:rPr>
+              <a:t>1. Prompt to YAML</a:t>
+            </a:r>
+          </a:p>
+          <a:p>
+            <a:r>
+              <a:rPr sz="1000">
+                <a:solidFill>
+                  <a:srgbClr val="E8F3FF"/>
+                </a:solidFill>
+                <a:latin typeface="Aptos"/>
+              </a:rPr>
+              <a:t>Natural-language request generates structured AUTOSAR YAML in-app.</a:t>
+            </a:r>
+          </a:p>
+        </p:txBody>
+      </p:sp>
+      <p:sp>
+        <p:nvSpPr>
+          <p:cNvPr id="11" name="Rounded Rectangle 10"/>
+          <p:cNvSpPr/>
+          <p:nvPr/>
+        </p:nvSpPr>
+        <p:spPr>
+          <a:xfrm>
+            <a:off x="7543800" y="5440680"/>
+            <a:ext cx="3383280" cy="658368"/>
+          </a:xfrm>
+          <a:prstGeom prst="roundRect">
+            <a:avLst/>
+          </a:prstGeom>
+          <a:solidFill>
+            <a:srgbClr val="0A1522"/>
+          </a:solidFill>
+          <a:ln w="16510">
+            <a:solidFill>
+              <a:srgbClr val="FFBF54"/>
+            </a:solidFill>
+          </a:ln>
+        </p:spPr>
+        <p:style>
+          <a:lnRef idx="1">
+            <a:schemeClr val="accent1"/>
+          </a:lnRef>
+          <a:fillRef idx="3">
+            <a:schemeClr val="accent1"/>
+          </a:fillRef>
+          <a:effectRef idx="2">
+            <a:schemeClr val="accent1"/>
+          </a:effectRef>
+          <a:fontRef idx="minor">
+            <a:schemeClr val="lt1"/>
+          </a:fontRef>
+        </p:style>
+        <p:txBody>
+          <a:bodyPr rtlCol="0" anchor="ctr" wrap="square"/>
+          <a:lstStyle/>
+          <a:p>
+            <a:pPr algn="ctr"/>
+            <a:r>
+              <a:rPr sz="1200" b="1">
+                <a:solidFill>
+                  <a:srgbClr val="FFBF54"/>
+                </a:solidFill>
+                <a:latin typeface="Aptos Display"/>
+              </a:rPr>
+              <a:t>2. HMI linkage</a:t>
+            </a:r>
+          </a:p>
+          <a:p>
+            <a:r>
+              <a:rPr sz="1000">
+                <a:solidFill>
+                  <a:srgbClr val="E8F3FF"/>
+                </a:solidFill>
+                <a:latin typeface="Aptos"/>
+              </a:rPr>
+              <a:t>Loaded ARXML authorizes telltales before the cluster can be controlled.</a:t>
+            </a:r>
+          </a:p>
+        </p:txBody>
+      </p:sp>
+      <p:sp>
+        <p:nvSpPr>
+          <p:cNvPr id="12" name="TextBox 11"/>
           <p:cNvSpPr txBox="1"/>
           <p:nvPr/>
         </p:nvSpPr>
@@ -3885,7 +4017,7 @@
                 </a:solidFill>
                 <a:latin typeface="Aptos Display"/>
               </a:rPr>
-              <a:t>Why This Matters</a:t>
+              <a:t>Compile and Safety Evidence</a:t>
             </a:r>
           </a:p>
         </p:txBody>
@@ -3898,8 +4030,8 @@
         </p:nvSpPr>
         <p:spPr>
           <a:xfrm>
-            <a:off x="594360" y="868680"/>
-            <a:ext cx="7040880" cy="5212080"/>
+            <a:off x="594360" y="749808"/>
+            <a:ext cx="8046720" cy="320040"/>
           </a:xfrm>
           <a:prstGeom prst="rect">
             <a:avLst/>
@@ -3907,72 +4039,19 @@
           <a:noFill/>
         </p:spPr>
         <p:txBody>
-          <a:bodyPr wrap="square">
+          <a:bodyPr wrap="none">
             <a:spAutoFit/>
           </a:bodyPr>
           <a:lstStyle/>
           <a:p>
-            <a:pPr>
-              <a:spcAft>
-                <a:spcPts val="1000"/>
-              </a:spcAft>
-              <a:defRPr sz="1800">
-                <a:solidFill>
-                  <a:srgbClr val="E8F3FF"/>
-                </a:solidFill>
-                <a:latin typeface="Aptos"/>
-              </a:defRPr>
-            </a:pPr>
-            <a:r>
-              <a:t>Faster concept-to-architecture turnaround for SDV teams working across Classic and Adaptive AUTOSAR stacks.</a:t>
-            </a:r>
-          </a:p>
-          <a:p>
-            <a:pPr>
-              <a:spcAft>
-                <a:spcPts val="1000"/>
-              </a:spcAft>
-              <a:defRPr sz="1800">
-                <a:solidFill>
-                  <a:srgbClr val="E8F3FF"/>
-                </a:solidFill>
-                <a:latin typeface="Aptos"/>
-              </a:defRPr>
-            </a:pPr>
-            <a:r>
-              <a:t>Earlier safety feedback reduces rework and makes ASIL-oriented design tradeoffs visible sooner.</a:t>
-            </a:r>
-          </a:p>
-          <a:p>
-            <a:pPr>
-              <a:spcAft>
-                <a:spcPts val="1000"/>
-              </a:spcAft>
-              <a:defRPr sz="1800">
-                <a:solidFill>
-                  <a:srgbClr val="E8F3FF"/>
-                </a:solidFill>
-                <a:latin typeface="Aptos"/>
-              </a:defRPr>
-            </a:pPr>
-            <a:r>
-              <a:t>Local-first inference and tenant separation make the approach suitable for sensitive automotive design environments.</a:t>
-            </a:r>
-          </a:p>
-          <a:p>
-            <a:pPr>
-              <a:spcAft>
-                <a:spcPts val="1000"/>
-              </a:spcAft>
-              <a:defRPr sz="1800">
-                <a:solidFill>
-                  <a:srgbClr val="E8F3FF"/>
-                </a:solidFill>
-                <a:latin typeface="Aptos"/>
-              </a:defRPr>
-            </a:pPr>
-            <a:r>
-              <a:t>The same framework can evolve from hackathon scaffold into a stronger engineering assistant with richer schema validation and enterprise identity.</a:t>
+            <a:r>
+              <a:rPr sz="1600">
+                <a:solidFill>
+                  <a:srgbClr val="B8D0E5"/>
+                </a:solidFill>
+                <a:latin typeface="Aptos"/>
+              </a:rPr>
+              <a:t>Dual ARXML output and safety validation results captured from the live app</a:t>
             </a:r>
           </a:p>
         </p:txBody>
@@ -3985,138 +4064,8 @@
         </p:nvSpPr>
         <p:spPr>
           <a:xfrm>
-            <a:off x="7818120" y="960120"/>
-            <a:ext cx="3703320" cy="1234440"/>
-          </a:xfrm>
-          <a:prstGeom prst="roundRect">
-            <a:avLst/>
-          </a:prstGeom>
-          <a:solidFill>
-            <a:srgbClr val="132B49"/>
-          </a:solidFill>
-          <a:ln w="22860">
-            <a:solidFill>
-              <a:srgbClr val="2DE2A8"/>
-            </a:solidFill>
-          </a:ln>
-        </p:spPr>
-        <p:style>
-          <a:lnRef idx="1">
-            <a:schemeClr val="accent1"/>
-          </a:lnRef>
-          <a:fillRef idx="3">
-            <a:schemeClr val="accent1"/>
-          </a:fillRef>
-          <a:effectRef idx="2">
-            <a:schemeClr val="accent1"/>
-          </a:effectRef>
-          <a:fontRef idx="minor">
-            <a:schemeClr val="lt1"/>
-          </a:fontRef>
-        </p:style>
-        <p:txBody>
-          <a:bodyPr rtlCol="0" anchor="ctr" wrap="square"/>
-          <a:lstStyle/>
-          <a:p>
-            <a:pPr algn="ctr"/>
-            <a:r>
-              <a:rPr sz="1600" b="1">
-                <a:solidFill>
-                  <a:srgbClr val="2DE2A8"/>
-                </a:solidFill>
-                <a:latin typeface="Aptos Display"/>
-              </a:rPr>
-              <a:t>Benefit</a:t>
-            </a:r>
-          </a:p>
-          <a:p>
-            <a:r>
-              <a:rPr sz="1400">
-                <a:solidFill>
-                  <a:srgbClr val="E8F3FF"/>
-                </a:solidFill>
-                <a:latin typeface="Aptos"/>
-              </a:rPr>
-              <a:t>Speed, consistency, safety visibility, and demo-grade explainability</a:t>
-            </a:r>
-          </a:p>
-        </p:txBody>
-      </p:sp>
-      <p:sp>
-        <p:nvSpPr>
-          <p:cNvPr id="5" name="Rounded Rectangle 4"/>
-          <p:cNvSpPr/>
-          <p:nvPr/>
-        </p:nvSpPr>
-        <p:spPr>
-          <a:xfrm>
-            <a:off x="502920" y="5074920"/>
-            <a:ext cx="3608832" cy="960120"/>
-          </a:xfrm>
-          <a:prstGeom prst="roundRect">
-            <a:avLst/>
-          </a:prstGeom>
-          <a:solidFill>
-            <a:srgbClr val="102238"/>
-          </a:solidFill>
-          <a:ln w="19050">
-            <a:solidFill>
-              <a:srgbClr val="2DE2A8"/>
-            </a:solidFill>
-          </a:ln>
-        </p:spPr>
-        <p:style>
-          <a:lnRef idx="1">
-            <a:schemeClr val="accent1"/>
-          </a:lnRef>
-          <a:fillRef idx="3">
-            <a:schemeClr val="accent1"/>
-          </a:fillRef>
-          <a:effectRef idx="2">
-            <a:schemeClr val="accent1"/>
-          </a:effectRef>
-          <a:fontRef idx="minor">
-            <a:schemeClr val="lt1"/>
-          </a:fontRef>
-        </p:style>
-        <p:txBody>
-          <a:bodyPr rtlCol="0" anchor="ctr"/>
-          <a:lstStyle/>
-          <a:p>
-            <a:pPr algn="ctr"/>
-            <a:r>
-              <a:rPr sz="2000" b="1">
-                <a:solidFill>
-                  <a:srgbClr val="2DE2A8"/>
-                </a:solidFill>
-                <a:latin typeface="Aptos Display"/>
-              </a:rPr>
-              <a:t>Ollama default</a:t>
-            </a:r>
-          </a:p>
-          <a:p>
-            <a:r>
-              <a:rPr sz="1100">
-                <a:solidFill>
-                  <a:srgbClr val="B8D0E5"/>
-                </a:solidFill>
-                <a:latin typeface="Aptos"/>
-              </a:rPr>
-              <a:t>Local-first</a:t>
-            </a:r>
-          </a:p>
-        </p:txBody>
-      </p:sp>
-      <p:sp>
-        <p:nvSpPr>
-          <p:cNvPr id="6" name="Rounded Rectangle 5"/>
-          <p:cNvSpPr/>
-          <p:nvPr/>
-        </p:nvSpPr>
-        <p:spPr>
-          <a:xfrm>
-            <a:off x="4276344" y="5074920"/>
-            <a:ext cx="3608832" cy="960120"/>
+            <a:off x="594360" y="1097280"/>
+            <a:ext cx="8321040" cy="5257800"/>
           </a:xfrm>
           <a:prstGeom prst="roundRect">
             <a:avLst/>
@@ -4149,16 +4098,54 @@
           <a:lstStyle/>
           <a:p>
             <a:pPr algn="ctr"/>
-            <a:r>
-              <a:rPr sz="2000" b="1">
-                <a:solidFill>
-                  <a:srgbClr val="39B8FF"/>
-                </a:solidFill>
-                <a:latin typeface="Aptos Display"/>
-              </a:rPr>
-              <a:t>Chroma + references</a:t>
-            </a:r>
-          </a:p>
+          </a:p>
+        </p:txBody>
+      </p:sp>
+      <p:pic>
+        <p:nvPicPr>
+          <p:cNvPr id="5" name="Picture 4" descr="streamlit_compile_safety.png"/>
+          <p:cNvPicPr>
+            <a:picLocks noChangeAspect="1"/>
+          </p:cNvPicPr>
+          <p:nvPr/>
+        </p:nvPicPr>
+        <p:blipFill>
+          <a:blip r:embed="rId2"/>
+          <a:stretch>
+            <a:fillRect/>
+          </a:stretch>
+        </p:blipFill>
+        <p:spPr>
+          <a:xfrm>
+            <a:off x="667512" y="1170432"/>
+            <a:ext cx="8174736" cy="4818888"/>
+          </a:xfrm>
+          <a:prstGeom prst="rect">
+            <a:avLst/>
+          </a:prstGeom>
+        </p:spPr>
+      </p:pic>
+      <p:sp>
+        <p:nvSpPr>
+          <p:cNvPr id="6" name="TextBox 5"/>
+          <p:cNvSpPr txBox="1"/>
+          <p:nvPr/>
+        </p:nvSpPr>
+        <p:spPr>
+          <a:xfrm>
+            <a:off x="685800" y="6053328"/>
+            <a:ext cx="8138160" cy="182880"/>
+          </a:xfrm>
+          <a:prstGeom prst="rect">
+            <a:avLst/>
+          </a:prstGeom>
+          <a:noFill/>
+        </p:spPr>
+        <p:txBody>
+          <a:bodyPr wrap="none">
+            <a:spAutoFit/>
+          </a:bodyPr>
+          <a:lstStyle/>
           <a:p>
             <a:r>
               <a:rPr sz="1100">
@@ -4167,7 +4154,7 @@
                 </a:solidFill>
                 <a:latin typeface="Aptos"/>
               </a:rPr>
-              <a:t>RAG</a:t>
+              <a:t>Live app state showing Classic ARXML output and safety status after compile/check</a:t>
             </a:r>
           </a:p>
         </p:txBody>
@@ -4180,18 +4167,18 @@
         </p:nvSpPr>
         <p:spPr>
           <a:xfrm>
-            <a:off x="8049768" y="5074920"/>
-            <a:ext cx="3608832" cy="960120"/>
+            <a:off x="9144000" y="1417320"/>
+            <a:ext cx="2423160" cy="868680"/>
           </a:xfrm>
           <a:prstGeom prst="roundRect">
             <a:avLst/>
           </a:prstGeom>
           <a:solidFill>
-            <a:srgbClr val="102238"/>
+            <a:srgbClr val="0A1522"/>
           </a:solidFill>
-          <a:ln w="19050">
+          <a:ln w="16510">
             <a:solidFill>
-              <a:srgbClr val="FFBF54"/>
+              <a:srgbClr val="39B8FF"/>
             </a:solidFill>
           </a:ln>
         </p:spPr>
@@ -4210,36 +4197,166 @@
           </a:fontRef>
         </p:style>
         <p:txBody>
-          <a:bodyPr rtlCol="0" anchor="ctr"/>
+          <a:bodyPr rtlCol="0" anchor="ctr" wrap="square"/>
           <a:lstStyle/>
           <a:p>
             <a:pPr algn="ctr"/>
             <a:r>
-              <a:rPr sz="2000" b="1">
-                <a:solidFill>
-                  <a:srgbClr val="FFBF54"/>
+              <a:rPr sz="1200" b="1">
+                <a:solidFill>
+                  <a:srgbClr val="39B8FF"/>
                 </a:solidFill>
                 <a:latin typeface="Aptos Display"/>
               </a:rPr>
-              <a:t>Audit + tenant scope</a:t>
-            </a:r>
-          </a:p>
-          <a:p>
-            <a:r>
-              <a:rPr sz="1100">
-                <a:solidFill>
-                  <a:srgbClr val="B8D0E5"/>
-                </a:solidFill>
-                <a:latin typeface="Aptos"/>
-              </a:rPr>
-              <a:t>Governance</a:t>
-            </a:r>
-          </a:p>
-        </p:txBody>
-      </p:sp>
-      <p:sp>
-        <p:nvSpPr>
-          <p:cNvPr id="8" name="TextBox 7"/>
+              <a:t>Dual output</a:t>
+            </a:r>
+          </a:p>
+          <a:p>
+            <a:r>
+              <a:rPr sz="1000">
+                <a:solidFill>
+                  <a:srgbClr val="E8F3FF"/>
+                </a:solidFill>
+                <a:latin typeface="Aptos"/>
+              </a:rPr>
+              <a:t>One compile flow now generates both Adaptive and Classic ARXML downloads.</a:t>
+            </a:r>
+          </a:p>
+        </p:txBody>
+      </p:sp>
+      <p:sp>
+        <p:nvSpPr>
+          <p:cNvPr id="8" name="Rounded Rectangle 7"/>
+          <p:cNvSpPr/>
+          <p:nvPr/>
+        </p:nvSpPr>
+        <p:spPr>
+          <a:xfrm>
+            <a:off x="9144000" y="2560320"/>
+            <a:ext cx="2423160" cy="1005840"/>
+          </a:xfrm>
+          <a:prstGeom prst="roundRect">
+            <a:avLst/>
+          </a:prstGeom>
+          <a:solidFill>
+            <a:srgbClr val="0A1522"/>
+          </a:solidFill>
+          <a:ln w="16510">
+            <a:solidFill>
+              <a:srgbClr val="FF6262"/>
+            </a:solidFill>
+          </a:ln>
+        </p:spPr>
+        <p:style>
+          <a:lnRef idx="1">
+            <a:schemeClr val="accent1"/>
+          </a:lnRef>
+          <a:fillRef idx="3">
+            <a:schemeClr val="accent1"/>
+          </a:fillRef>
+          <a:effectRef idx="2">
+            <a:schemeClr val="accent1"/>
+          </a:effectRef>
+          <a:fontRef idx="minor">
+            <a:schemeClr val="lt1"/>
+          </a:fontRef>
+        </p:style>
+        <p:txBody>
+          <a:bodyPr rtlCol="0" anchor="ctr" wrap="square"/>
+          <a:lstStyle/>
+          <a:p>
+            <a:pPr algn="ctr"/>
+            <a:r>
+              <a:rPr sz="1200" b="1">
+                <a:solidFill>
+                  <a:srgbClr val="FF6262"/>
+                </a:solidFill>
+                <a:latin typeface="Aptos Display"/>
+              </a:rPr>
+              <a:t>Safety feedback</a:t>
+            </a:r>
+          </a:p>
+          <a:p>
+            <a:r>
+              <a:rPr sz="1000">
+                <a:solidFill>
+                  <a:srgbClr val="E8F3FF"/>
+                </a:solidFill>
+                <a:latin typeface="Aptos"/>
+              </a:rPr>
+              <a:t>Warnings surface immediately so the demo shows engineering governance, not just generation.</a:t>
+            </a:r>
+          </a:p>
+        </p:txBody>
+      </p:sp>
+      <p:sp>
+        <p:nvSpPr>
+          <p:cNvPr id="9" name="Rounded Rectangle 8"/>
+          <p:cNvSpPr/>
+          <p:nvPr/>
+        </p:nvSpPr>
+        <p:spPr>
+          <a:xfrm>
+            <a:off x="9144000" y="3886200"/>
+            <a:ext cx="2423160" cy="1051560"/>
+          </a:xfrm>
+          <a:prstGeom prst="roundRect">
+            <a:avLst/>
+          </a:prstGeom>
+          <a:solidFill>
+            <a:srgbClr val="0A1522"/>
+          </a:solidFill>
+          <a:ln w="16510">
+            <a:solidFill>
+              <a:srgbClr val="2DE2A8"/>
+            </a:solidFill>
+          </a:ln>
+        </p:spPr>
+        <p:style>
+          <a:lnRef idx="1">
+            <a:schemeClr val="accent1"/>
+          </a:lnRef>
+          <a:fillRef idx="3">
+            <a:schemeClr val="accent1"/>
+          </a:fillRef>
+          <a:effectRef idx="2">
+            <a:schemeClr val="accent1"/>
+          </a:effectRef>
+          <a:fontRef idx="minor">
+            <a:schemeClr val="lt1"/>
+          </a:fontRef>
+        </p:style>
+        <p:txBody>
+          <a:bodyPr rtlCol="0" anchor="ctr" wrap="square"/>
+          <a:lstStyle/>
+          <a:p>
+            <a:pPr algn="ctr"/>
+            <a:r>
+              <a:rPr sz="1200" b="1">
+                <a:solidFill>
+                  <a:srgbClr val="2DE2A8"/>
+                </a:solidFill>
+                <a:latin typeface="Aptos Display"/>
+              </a:rPr>
+              <a:t>Judge takeaway</a:t>
+            </a:r>
+          </a:p>
+          <a:p>
+            <a:r>
+              <a:rPr sz="1000">
+                <a:solidFill>
+                  <a:srgbClr val="E8F3FF"/>
+                </a:solidFill>
+                <a:latin typeface="Aptos"/>
+              </a:rPr>
+              <a:t>This is a working pipeline: model output, compile artifact, and validation evidence in one UI.</a:t>
+            </a:r>
+          </a:p>
+        </p:txBody>
+      </p:sp>
+      <p:sp>
+        <p:nvSpPr>
+          <p:cNvPr id="10" name="TextBox 9"/>
           <p:cNvSpPr txBox="1"/>
           <p:nvPr/>
         </p:nvSpPr>
@@ -4344,6 +4461,989 @@
                 </a:solidFill>
                 <a:latin typeface="Aptos Display"/>
               </a:rPr>
+              <a:t>Why This Matters</a:t>
+            </a:r>
+          </a:p>
+        </p:txBody>
+      </p:sp>
+      <p:sp>
+        <p:nvSpPr>
+          <p:cNvPr id="3" name="TextBox 2"/>
+          <p:cNvSpPr txBox="1"/>
+          <p:nvPr/>
+        </p:nvSpPr>
+        <p:spPr>
+          <a:xfrm>
+            <a:off x="594360" y="868680"/>
+            <a:ext cx="7040880" cy="5212080"/>
+          </a:xfrm>
+          <a:prstGeom prst="rect">
+            <a:avLst/>
+          </a:prstGeom>
+          <a:noFill/>
+        </p:spPr>
+        <p:txBody>
+          <a:bodyPr wrap="square">
+            <a:spAutoFit/>
+          </a:bodyPr>
+          <a:lstStyle/>
+          <a:p>
+            <a:pPr>
+              <a:spcAft>
+                <a:spcPts val="1000"/>
+              </a:spcAft>
+              <a:defRPr sz="1800">
+                <a:solidFill>
+                  <a:srgbClr val="E8F3FF"/>
+                </a:solidFill>
+                <a:latin typeface="Aptos"/>
+              </a:defRPr>
+            </a:pPr>
+            <a:r>
+              <a:t>Faster concept-to-architecture turnaround for SDV teams working across Classic and Adaptive AUTOSAR stacks.</a:t>
+            </a:r>
+          </a:p>
+          <a:p>
+            <a:pPr>
+              <a:spcAft>
+                <a:spcPts val="1000"/>
+              </a:spcAft>
+              <a:defRPr sz="1800">
+                <a:solidFill>
+                  <a:srgbClr val="E8F3FF"/>
+                </a:solidFill>
+                <a:latin typeface="Aptos"/>
+              </a:defRPr>
+            </a:pPr>
+            <a:r>
+              <a:t>Earlier safety feedback reduces rework and makes ASIL-oriented design tradeoffs visible sooner.</a:t>
+            </a:r>
+          </a:p>
+          <a:p>
+            <a:pPr>
+              <a:spcAft>
+                <a:spcPts val="1000"/>
+              </a:spcAft>
+              <a:defRPr sz="1800">
+                <a:solidFill>
+                  <a:srgbClr val="E8F3FF"/>
+                </a:solidFill>
+                <a:latin typeface="Aptos"/>
+              </a:defRPr>
+            </a:pPr>
+            <a:r>
+              <a:t>Local-first inference and tenant separation make the approach suitable for sensitive automotive design environments.</a:t>
+            </a:r>
+          </a:p>
+          <a:p>
+            <a:pPr>
+              <a:spcAft>
+                <a:spcPts val="1000"/>
+              </a:spcAft>
+              <a:defRPr sz="1800">
+                <a:solidFill>
+                  <a:srgbClr val="E8F3FF"/>
+                </a:solidFill>
+                <a:latin typeface="Aptos"/>
+              </a:defRPr>
+            </a:pPr>
+            <a:r>
+              <a:t>The same framework can evolve from hackathon scaffold into a stronger engineering assistant with richer schema validation and enterprise identity.</a:t>
+            </a:r>
+          </a:p>
+        </p:txBody>
+      </p:sp>
+      <p:sp>
+        <p:nvSpPr>
+          <p:cNvPr id="4" name="Rounded Rectangle 3"/>
+          <p:cNvSpPr/>
+          <p:nvPr/>
+        </p:nvSpPr>
+        <p:spPr>
+          <a:xfrm>
+            <a:off x="7818120" y="960120"/>
+            <a:ext cx="3703320" cy="1234440"/>
+          </a:xfrm>
+          <a:prstGeom prst="roundRect">
+            <a:avLst/>
+          </a:prstGeom>
+          <a:solidFill>
+            <a:srgbClr val="132B49"/>
+          </a:solidFill>
+          <a:ln w="22860">
+            <a:solidFill>
+              <a:srgbClr val="2DE2A8"/>
+            </a:solidFill>
+          </a:ln>
+        </p:spPr>
+        <p:style>
+          <a:lnRef idx="1">
+            <a:schemeClr val="accent1"/>
+          </a:lnRef>
+          <a:fillRef idx="3">
+            <a:schemeClr val="accent1"/>
+          </a:fillRef>
+          <a:effectRef idx="2">
+            <a:schemeClr val="accent1"/>
+          </a:effectRef>
+          <a:fontRef idx="minor">
+            <a:schemeClr val="lt1"/>
+          </a:fontRef>
+        </p:style>
+        <p:txBody>
+          <a:bodyPr rtlCol="0" anchor="ctr" wrap="square"/>
+          <a:lstStyle/>
+          <a:p>
+            <a:pPr algn="ctr"/>
+            <a:r>
+              <a:rPr sz="1600" b="1">
+                <a:solidFill>
+                  <a:srgbClr val="2DE2A8"/>
+                </a:solidFill>
+                <a:latin typeface="Aptos Display"/>
+              </a:rPr>
+              <a:t>Benefit</a:t>
+            </a:r>
+          </a:p>
+          <a:p>
+            <a:r>
+              <a:rPr sz="1400">
+                <a:solidFill>
+                  <a:srgbClr val="E8F3FF"/>
+                </a:solidFill>
+                <a:latin typeface="Aptos"/>
+              </a:rPr>
+              <a:t>Speed, consistency, safety visibility, and demo-grade explainability</a:t>
+            </a:r>
+          </a:p>
+        </p:txBody>
+      </p:sp>
+      <p:sp>
+        <p:nvSpPr>
+          <p:cNvPr id="5" name="Rounded Rectangle 4"/>
+          <p:cNvSpPr/>
+          <p:nvPr/>
+        </p:nvSpPr>
+        <p:spPr>
+          <a:xfrm>
+            <a:off x="502920" y="5074920"/>
+            <a:ext cx="3608832" cy="960120"/>
+          </a:xfrm>
+          <a:prstGeom prst="roundRect">
+            <a:avLst/>
+          </a:prstGeom>
+          <a:solidFill>
+            <a:srgbClr val="102238"/>
+          </a:solidFill>
+          <a:ln w="19050">
+            <a:solidFill>
+              <a:srgbClr val="2DE2A8"/>
+            </a:solidFill>
+          </a:ln>
+        </p:spPr>
+        <p:style>
+          <a:lnRef idx="1">
+            <a:schemeClr val="accent1"/>
+          </a:lnRef>
+          <a:fillRef idx="3">
+            <a:schemeClr val="accent1"/>
+          </a:fillRef>
+          <a:effectRef idx="2">
+            <a:schemeClr val="accent1"/>
+          </a:effectRef>
+          <a:fontRef idx="minor">
+            <a:schemeClr val="lt1"/>
+          </a:fontRef>
+        </p:style>
+        <p:txBody>
+          <a:bodyPr rtlCol="0" anchor="ctr"/>
+          <a:lstStyle/>
+          <a:p>
+            <a:pPr algn="ctr"/>
+            <a:r>
+              <a:rPr sz="2000" b="1">
+                <a:solidFill>
+                  <a:srgbClr val="2DE2A8"/>
+                </a:solidFill>
+                <a:latin typeface="Aptos Display"/>
+              </a:rPr>
+              <a:t>Ollama default</a:t>
+            </a:r>
+          </a:p>
+          <a:p>
+            <a:r>
+              <a:rPr sz="1100">
+                <a:solidFill>
+                  <a:srgbClr val="B8D0E5"/>
+                </a:solidFill>
+                <a:latin typeface="Aptos"/>
+              </a:rPr>
+              <a:t>Local-first</a:t>
+            </a:r>
+          </a:p>
+        </p:txBody>
+      </p:sp>
+      <p:sp>
+        <p:nvSpPr>
+          <p:cNvPr id="6" name="Rounded Rectangle 5"/>
+          <p:cNvSpPr/>
+          <p:nvPr/>
+        </p:nvSpPr>
+        <p:spPr>
+          <a:xfrm>
+            <a:off x="4276344" y="5074920"/>
+            <a:ext cx="3608832" cy="960120"/>
+          </a:xfrm>
+          <a:prstGeom prst="roundRect">
+            <a:avLst/>
+          </a:prstGeom>
+          <a:solidFill>
+            <a:srgbClr val="102238"/>
+          </a:solidFill>
+          <a:ln w="19050">
+            <a:solidFill>
+              <a:srgbClr val="39B8FF"/>
+            </a:solidFill>
+          </a:ln>
+        </p:spPr>
+        <p:style>
+          <a:lnRef idx="1">
+            <a:schemeClr val="accent1"/>
+          </a:lnRef>
+          <a:fillRef idx="3">
+            <a:schemeClr val="accent1"/>
+          </a:fillRef>
+          <a:effectRef idx="2">
+            <a:schemeClr val="accent1"/>
+          </a:effectRef>
+          <a:fontRef idx="minor">
+            <a:schemeClr val="lt1"/>
+          </a:fontRef>
+        </p:style>
+        <p:txBody>
+          <a:bodyPr rtlCol="0" anchor="ctr"/>
+          <a:lstStyle/>
+          <a:p>
+            <a:pPr algn="ctr"/>
+            <a:r>
+              <a:rPr sz="2000" b="1">
+                <a:solidFill>
+                  <a:srgbClr val="39B8FF"/>
+                </a:solidFill>
+                <a:latin typeface="Aptos Display"/>
+              </a:rPr>
+              <a:t>Chroma + references</a:t>
+            </a:r>
+          </a:p>
+          <a:p>
+            <a:r>
+              <a:rPr sz="1100">
+                <a:solidFill>
+                  <a:srgbClr val="B8D0E5"/>
+                </a:solidFill>
+                <a:latin typeface="Aptos"/>
+              </a:rPr>
+              <a:t>RAG</a:t>
+            </a:r>
+          </a:p>
+        </p:txBody>
+      </p:sp>
+      <p:sp>
+        <p:nvSpPr>
+          <p:cNvPr id="7" name="Rounded Rectangle 6"/>
+          <p:cNvSpPr/>
+          <p:nvPr/>
+        </p:nvSpPr>
+        <p:spPr>
+          <a:xfrm>
+            <a:off x="8049768" y="5074920"/>
+            <a:ext cx="3608832" cy="960120"/>
+          </a:xfrm>
+          <a:prstGeom prst="roundRect">
+            <a:avLst/>
+          </a:prstGeom>
+          <a:solidFill>
+            <a:srgbClr val="102238"/>
+          </a:solidFill>
+          <a:ln w="19050">
+            <a:solidFill>
+              <a:srgbClr val="FFBF54"/>
+            </a:solidFill>
+          </a:ln>
+        </p:spPr>
+        <p:style>
+          <a:lnRef idx="1">
+            <a:schemeClr val="accent1"/>
+          </a:lnRef>
+          <a:fillRef idx="3">
+            <a:schemeClr val="accent1"/>
+          </a:fillRef>
+          <a:effectRef idx="2">
+            <a:schemeClr val="accent1"/>
+          </a:effectRef>
+          <a:fontRef idx="minor">
+            <a:schemeClr val="lt1"/>
+          </a:fontRef>
+        </p:style>
+        <p:txBody>
+          <a:bodyPr rtlCol="0" anchor="ctr"/>
+          <a:lstStyle/>
+          <a:p>
+            <a:pPr algn="ctr"/>
+            <a:r>
+              <a:rPr sz="2000" b="1">
+                <a:solidFill>
+                  <a:srgbClr val="FFBF54"/>
+                </a:solidFill>
+                <a:latin typeface="Aptos Display"/>
+              </a:rPr>
+              <a:t>Audit + tenant scope</a:t>
+            </a:r>
+          </a:p>
+          <a:p>
+            <a:r>
+              <a:rPr sz="1100">
+                <a:solidFill>
+                  <a:srgbClr val="B8D0E5"/>
+                </a:solidFill>
+                <a:latin typeface="Aptos"/>
+              </a:rPr>
+              <a:t>Governance</a:t>
+            </a:r>
+          </a:p>
+        </p:txBody>
+      </p:sp>
+      <p:sp>
+        <p:nvSpPr>
+          <p:cNvPr id="8" name="TextBox 7"/>
+          <p:cNvSpPr txBox="1"/>
+          <p:nvPr/>
+        </p:nvSpPr>
+        <p:spPr>
+          <a:xfrm>
+            <a:off x="411480" y="6446520"/>
+            <a:ext cx="5029200" cy="256032"/>
+          </a:xfrm>
+          <a:prstGeom prst="rect">
+            <a:avLst/>
+          </a:prstGeom>
+          <a:noFill/>
+        </p:spPr>
+        <p:txBody>
+          <a:bodyPr wrap="none">
+            <a:spAutoFit/>
+          </a:bodyPr>
+          <a:lstStyle/>
+          <a:p>
+            <a:r>
+              <a:rPr sz="1000">
+                <a:solidFill>
+                  <a:srgbClr val="B8D0E5"/>
+                </a:solidFill>
+                <a:latin typeface="Aptos"/>
+              </a:rPr>
+              <a:t>AUTOSAR AI MDE Hackathon Demo</a:t>
+            </a:r>
+          </a:p>
+        </p:txBody>
+      </p:sp>
+    </p:spTree>
+  </p:cSld>
+  <p:clrMapOvr>
+    <a:masterClrMapping/>
+  </p:clrMapOvr>
+</p:sld>
+</file>
+
+<file path=ppt/slides/slide13.xml><?xml version="1.0" encoding="utf-8"?>
+<p:sld xmlns:a="http://schemas.openxmlformats.org/drawingml/2006/main" xmlns:p="http://schemas.openxmlformats.org/presentationml/2006/main" xmlns:r="http://schemas.openxmlformats.org/officeDocument/2006/relationships">
+  <p:cSld>
+    <p:bg>
+      <p:bgPr>
+        <a:solidFill>
+          <a:srgbClr val="091523"/>
+        </a:solidFill>
+        <a:effectLst/>
+      </p:bgPr>
+    </p:bg>
+    <p:spTree>
+      <p:nvGrpSpPr>
+        <p:cNvPr id="1" name=""/>
+        <p:cNvGrpSpPr/>
+        <p:nvPr/>
+      </p:nvGrpSpPr>
+      <p:grpSpPr/>
+      <p:sp>
+        <p:nvSpPr>
+          <p:cNvPr id="2" name="Rectangle 1"/>
+          <p:cNvSpPr/>
+          <p:nvPr/>
+        </p:nvSpPr>
+        <p:spPr>
+          <a:xfrm>
+            <a:off x="0" y="0"/>
+            <a:ext cx="12191695" cy="502920"/>
+          </a:xfrm>
+          <a:prstGeom prst="rect">
+            <a:avLst/>
+          </a:prstGeom>
+          <a:solidFill>
+            <a:srgbClr val="102238"/>
+          </a:solidFill>
+          <a:ln>
+            <a:noFill/>
+          </a:ln>
+        </p:spPr>
+        <p:style>
+          <a:lnRef idx="1">
+            <a:schemeClr val="accent1"/>
+          </a:lnRef>
+          <a:fillRef idx="3">
+            <a:schemeClr val="accent1"/>
+          </a:fillRef>
+          <a:effectRef idx="2">
+            <a:schemeClr val="accent1"/>
+          </a:effectRef>
+          <a:fontRef idx="minor">
+            <a:schemeClr val="lt1"/>
+          </a:fontRef>
+        </p:style>
+        <p:txBody>
+          <a:bodyPr rtlCol="0" anchor="ctr" lIns="228600"/>
+          <a:lstStyle/>
+          <a:p>
+            <a:pPr algn="l"/>
+            <a:r>
+              <a:rPr sz="2400" b="1">
+                <a:solidFill>
+                  <a:srgbClr val="FFFFFF"/>
+                </a:solidFill>
+                <a:latin typeface="Aptos Display"/>
+              </a:rPr>
+              <a:t>Judging Summary</a:t>
+            </a:r>
+          </a:p>
+        </p:txBody>
+      </p:sp>
+      <p:sp>
+        <p:nvSpPr>
+          <p:cNvPr id="3" name="TextBox 2"/>
+          <p:cNvSpPr txBox="1"/>
+          <p:nvPr/>
+        </p:nvSpPr>
+        <p:spPr>
+          <a:xfrm>
+            <a:off x="594360" y="868680"/>
+            <a:ext cx="7040880" cy="5212080"/>
+          </a:xfrm>
+          <a:prstGeom prst="rect">
+            <a:avLst/>
+          </a:prstGeom>
+          <a:noFill/>
+        </p:spPr>
+        <p:txBody>
+          <a:bodyPr wrap="square">
+            <a:spAutoFit/>
+          </a:bodyPr>
+          <a:lstStyle/>
+          <a:p>
+            <a:pPr>
+              <a:spcAft>
+                <a:spcPts val="1000"/>
+              </a:spcAft>
+              <a:defRPr sz="1800">
+                <a:solidFill>
+                  <a:srgbClr val="E8F3FF"/>
+                </a:solidFill>
+                <a:latin typeface="Aptos"/>
+              </a:defRPr>
+            </a:pPr>
+            <a:r>
+              <a:t>Innovation: combines local LLM generation, RAG, safety checks, ML mapping pre-check, and HMI simulation in one AUTOSAR demo flow.</a:t>
+            </a:r>
+          </a:p>
+          <a:p>
+            <a:pPr>
+              <a:spcAft>
+                <a:spcPts val="1000"/>
+              </a:spcAft>
+              <a:defRPr sz="1800">
+                <a:solidFill>
+                  <a:srgbClr val="E8F3FF"/>
+                </a:solidFill>
+                <a:latin typeface="Aptos"/>
+              </a:defRPr>
+            </a:pPr>
+            <a:r>
+              <a:t>Technical depth: covers YAML generation, dual ARXML compilation, tenant isolation, validation, audit logging, and UI-driven review.</a:t>
+            </a:r>
+          </a:p>
+          <a:p>
+            <a:pPr>
+              <a:spcAft>
+                <a:spcPts val="1000"/>
+              </a:spcAft>
+              <a:defRPr sz="1800">
+                <a:solidFill>
+                  <a:srgbClr val="E8F3FF"/>
+                </a:solidFill>
+                <a:latin typeface="Aptos"/>
+              </a:defRPr>
+            </a:pPr>
+            <a:r>
+              <a:t>Practical impact: accelerates AUTOSAR architecture iteration while exposing safety and communication issues earlier.</a:t>
+            </a:r>
+          </a:p>
+          <a:p>
+            <a:pPr>
+              <a:spcAft>
+                <a:spcPts val="1000"/>
+              </a:spcAft>
+              <a:defRPr sz="1800">
+                <a:solidFill>
+                  <a:srgbClr val="E8F3FF"/>
+                </a:solidFill>
+                <a:latin typeface="Aptos"/>
+              </a:defRPr>
+            </a:pPr>
+            <a:r>
+              <a:t>Demo strength: judges can see prompt input, generated artifacts, compile evidence, safety results, and HMI behavior in one session.</a:t>
+            </a:r>
+          </a:p>
+        </p:txBody>
+      </p:sp>
+      <p:sp>
+        <p:nvSpPr>
+          <p:cNvPr id="4" name="Rounded Rectangle 3"/>
+          <p:cNvSpPr/>
+          <p:nvPr/>
+        </p:nvSpPr>
+        <p:spPr>
+          <a:xfrm>
+            <a:off x="7818120" y="960120"/>
+            <a:ext cx="3703320" cy="1234440"/>
+          </a:xfrm>
+          <a:prstGeom prst="roundRect">
+            <a:avLst/>
+          </a:prstGeom>
+          <a:solidFill>
+            <a:srgbClr val="132B49"/>
+          </a:solidFill>
+          <a:ln w="22860">
+            <a:solidFill>
+              <a:srgbClr val="39B8FF"/>
+            </a:solidFill>
+          </a:ln>
+        </p:spPr>
+        <p:style>
+          <a:lnRef idx="1">
+            <a:schemeClr val="accent1"/>
+          </a:lnRef>
+          <a:fillRef idx="3">
+            <a:schemeClr val="accent1"/>
+          </a:fillRef>
+          <a:effectRef idx="2">
+            <a:schemeClr val="accent1"/>
+          </a:effectRef>
+          <a:fontRef idx="minor">
+            <a:schemeClr val="lt1"/>
+          </a:fontRef>
+        </p:style>
+        <p:txBody>
+          <a:bodyPr rtlCol="0" anchor="ctr" wrap="square"/>
+          <a:lstStyle/>
+          <a:p>
+            <a:pPr algn="ctr"/>
+            <a:r>
+              <a:rPr sz="1600" b="1">
+                <a:solidFill>
+                  <a:srgbClr val="39B8FF"/>
+                </a:solidFill>
+                <a:latin typeface="Aptos Display"/>
+              </a:rPr>
+              <a:t>One-line pitch</a:t>
+            </a:r>
+          </a:p>
+          <a:p>
+            <a:r>
+              <a:rPr sz="1400">
+                <a:solidFill>
+                  <a:srgbClr val="E8F3FF"/>
+                </a:solidFill>
+                <a:latin typeface="Aptos"/>
+              </a:rPr>
+              <a:t>An AI-assisted AUTOSAR copilot that turns intent into dual-stack artifacts with safety-aware feedback.</a:t>
+            </a:r>
+          </a:p>
+        </p:txBody>
+      </p:sp>
+      <p:sp>
+        <p:nvSpPr>
+          <p:cNvPr id="5" name="Rounded Rectangle 4"/>
+          <p:cNvSpPr/>
+          <p:nvPr/>
+        </p:nvSpPr>
+        <p:spPr>
+          <a:xfrm>
+            <a:off x="7818120" y="2377440"/>
+            <a:ext cx="3703320" cy="1234440"/>
+          </a:xfrm>
+          <a:prstGeom prst="roundRect">
+            <a:avLst/>
+          </a:prstGeom>
+          <a:solidFill>
+            <a:srgbClr val="132B49"/>
+          </a:solidFill>
+          <a:ln w="22860">
+            <a:solidFill>
+              <a:srgbClr val="FFBF54"/>
+            </a:solidFill>
+          </a:ln>
+        </p:spPr>
+        <p:style>
+          <a:lnRef idx="1">
+            <a:schemeClr val="accent1"/>
+          </a:lnRef>
+          <a:fillRef idx="3">
+            <a:schemeClr val="accent1"/>
+          </a:fillRef>
+          <a:effectRef idx="2">
+            <a:schemeClr val="accent1"/>
+          </a:effectRef>
+          <a:fontRef idx="minor">
+            <a:schemeClr val="lt1"/>
+          </a:fontRef>
+        </p:style>
+        <p:txBody>
+          <a:bodyPr rtlCol="0" anchor="ctr" wrap="square"/>
+          <a:lstStyle/>
+          <a:p>
+            <a:pPr algn="ctr"/>
+            <a:r>
+              <a:rPr sz="1600" b="1">
+                <a:solidFill>
+                  <a:srgbClr val="FFBF54"/>
+                </a:solidFill>
+                <a:latin typeface="Aptos Display"/>
+              </a:rPr>
+              <a:t>Judge lens</a:t>
+            </a:r>
+          </a:p>
+          <a:p>
+            <a:r>
+              <a:rPr sz="1400">
+                <a:solidFill>
+                  <a:srgbClr val="E8F3FF"/>
+                </a:solidFill>
+                <a:latin typeface="Aptos"/>
+              </a:rPr>
+              <a:t>Innovation + feasibility + impact + live proof</a:t>
+            </a:r>
+          </a:p>
+        </p:txBody>
+      </p:sp>
+      <p:sp>
+        <p:nvSpPr>
+          <p:cNvPr id="6" name="Rounded Rectangle 5"/>
+          <p:cNvSpPr/>
+          <p:nvPr/>
+        </p:nvSpPr>
+        <p:spPr>
+          <a:xfrm>
+            <a:off x="502920" y="5074920"/>
+            <a:ext cx="3608832" cy="960120"/>
+          </a:xfrm>
+          <a:prstGeom prst="roundRect">
+            <a:avLst/>
+          </a:prstGeom>
+          <a:solidFill>
+            <a:srgbClr val="102238"/>
+          </a:solidFill>
+          <a:ln w="19050">
+            <a:solidFill>
+              <a:srgbClr val="2DE2A8"/>
+            </a:solidFill>
+          </a:ln>
+        </p:spPr>
+        <p:style>
+          <a:lnRef idx="1">
+            <a:schemeClr val="accent1"/>
+          </a:lnRef>
+          <a:fillRef idx="3">
+            <a:schemeClr val="accent1"/>
+          </a:fillRef>
+          <a:effectRef idx="2">
+            <a:schemeClr val="accent1"/>
+          </a:effectRef>
+          <a:fontRef idx="minor">
+            <a:schemeClr val="lt1"/>
+          </a:fontRef>
+        </p:style>
+        <p:txBody>
+          <a:bodyPr rtlCol="0" anchor="ctr"/>
+          <a:lstStyle/>
+          <a:p>
+            <a:pPr algn="ctr"/>
+            <a:r>
+              <a:rPr sz="2000" b="1">
+                <a:solidFill>
+                  <a:srgbClr val="2DE2A8"/>
+                </a:solidFill>
+                <a:latin typeface="Aptos Display"/>
+              </a:rPr>
+              <a:t>Ollama default</a:t>
+            </a:r>
+          </a:p>
+          <a:p>
+            <a:r>
+              <a:rPr sz="1100">
+                <a:solidFill>
+                  <a:srgbClr val="B8D0E5"/>
+                </a:solidFill>
+                <a:latin typeface="Aptos"/>
+              </a:rPr>
+              <a:t>Local-first</a:t>
+            </a:r>
+          </a:p>
+        </p:txBody>
+      </p:sp>
+      <p:sp>
+        <p:nvSpPr>
+          <p:cNvPr id="7" name="Rounded Rectangle 6"/>
+          <p:cNvSpPr/>
+          <p:nvPr/>
+        </p:nvSpPr>
+        <p:spPr>
+          <a:xfrm>
+            <a:off x="4276344" y="5074920"/>
+            <a:ext cx="3608832" cy="960120"/>
+          </a:xfrm>
+          <a:prstGeom prst="roundRect">
+            <a:avLst/>
+          </a:prstGeom>
+          <a:solidFill>
+            <a:srgbClr val="102238"/>
+          </a:solidFill>
+          <a:ln w="19050">
+            <a:solidFill>
+              <a:srgbClr val="39B8FF"/>
+            </a:solidFill>
+          </a:ln>
+        </p:spPr>
+        <p:style>
+          <a:lnRef idx="1">
+            <a:schemeClr val="accent1"/>
+          </a:lnRef>
+          <a:fillRef idx="3">
+            <a:schemeClr val="accent1"/>
+          </a:fillRef>
+          <a:effectRef idx="2">
+            <a:schemeClr val="accent1"/>
+          </a:effectRef>
+          <a:fontRef idx="minor">
+            <a:schemeClr val="lt1"/>
+          </a:fontRef>
+        </p:style>
+        <p:txBody>
+          <a:bodyPr rtlCol="0" anchor="ctr"/>
+          <a:lstStyle/>
+          <a:p>
+            <a:pPr algn="ctr"/>
+            <a:r>
+              <a:rPr sz="2000" b="1">
+                <a:solidFill>
+                  <a:srgbClr val="39B8FF"/>
+                </a:solidFill>
+                <a:latin typeface="Aptos Display"/>
+              </a:rPr>
+              <a:t>Chroma + references</a:t>
+            </a:r>
+          </a:p>
+          <a:p>
+            <a:r>
+              <a:rPr sz="1100">
+                <a:solidFill>
+                  <a:srgbClr val="B8D0E5"/>
+                </a:solidFill>
+                <a:latin typeface="Aptos"/>
+              </a:rPr>
+              <a:t>RAG</a:t>
+            </a:r>
+          </a:p>
+        </p:txBody>
+      </p:sp>
+      <p:sp>
+        <p:nvSpPr>
+          <p:cNvPr id="8" name="Rounded Rectangle 7"/>
+          <p:cNvSpPr/>
+          <p:nvPr/>
+        </p:nvSpPr>
+        <p:spPr>
+          <a:xfrm>
+            <a:off x="8049768" y="5074920"/>
+            <a:ext cx="3608832" cy="960120"/>
+          </a:xfrm>
+          <a:prstGeom prst="roundRect">
+            <a:avLst/>
+          </a:prstGeom>
+          <a:solidFill>
+            <a:srgbClr val="102238"/>
+          </a:solidFill>
+          <a:ln w="19050">
+            <a:solidFill>
+              <a:srgbClr val="FFBF54"/>
+            </a:solidFill>
+          </a:ln>
+        </p:spPr>
+        <p:style>
+          <a:lnRef idx="1">
+            <a:schemeClr val="accent1"/>
+          </a:lnRef>
+          <a:fillRef idx="3">
+            <a:schemeClr val="accent1"/>
+          </a:fillRef>
+          <a:effectRef idx="2">
+            <a:schemeClr val="accent1"/>
+          </a:effectRef>
+          <a:fontRef idx="minor">
+            <a:schemeClr val="lt1"/>
+          </a:fontRef>
+        </p:style>
+        <p:txBody>
+          <a:bodyPr rtlCol="0" anchor="ctr"/>
+          <a:lstStyle/>
+          <a:p>
+            <a:pPr algn="ctr"/>
+            <a:r>
+              <a:rPr sz="2000" b="1">
+                <a:solidFill>
+                  <a:srgbClr val="FFBF54"/>
+                </a:solidFill>
+                <a:latin typeface="Aptos Display"/>
+              </a:rPr>
+              <a:t>Audit + tenant scope</a:t>
+            </a:r>
+          </a:p>
+          <a:p>
+            <a:r>
+              <a:rPr sz="1100">
+                <a:solidFill>
+                  <a:srgbClr val="B8D0E5"/>
+                </a:solidFill>
+                <a:latin typeface="Aptos"/>
+              </a:rPr>
+              <a:t>Governance</a:t>
+            </a:r>
+          </a:p>
+        </p:txBody>
+      </p:sp>
+      <p:sp>
+        <p:nvSpPr>
+          <p:cNvPr id="9" name="TextBox 8"/>
+          <p:cNvSpPr txBox="1"/>
+          <p:nvPr/>
+        </p:nvSpPr>
+        <p:spPr>
+          <a:xfrm>
+            <a:off x="411480" y="6446520"/>
+            <a:ext cx="5029200" cy="256032"/>
+          </a:xfrm>
+          <a:prstGeom prst="rect">
+            <a:avLst/>
+          </a:prstGeom>
+          <a:noFill/>
+        </p:spPr>
+        <p:txBody>
+          <a:bodyPr wrap="none">
+            <a:spAutoFit/>
+          </a:bodyPr>
+          <a:lstStyle/>
+          <a:p>
+            <a:r>
+              <a:rPr sz="1000">
+                <a:solidFill>
+                  <a:srgbClr val="B8D0E5"/>
+                </a:solidFill>
+                <a:latin typeface="Aptos"/>
+              </a:rPr>
+              <a:t>AUTOSAR AI MDE Hackathon Demo</a:t>
+            </a:r>
+          </a:p>
+        </p:txBody>
+      </p:sp>
+    </p:spTree>
+  </p:cSld>
+  <p:clrMapOvr>
+    <a:masterClrMapping/>
+  </p:clrMapOvr>
+</p:sld>
+</file>
+
+<file path=ppt/slides/slide14.xml><?xml version="1.0" encoding="utf-8"?>
+<p:sld xmlns:a="http://schemas.openxmlformats.org/drawingml/2006/main" xmlns:p="http://schemas.openxmlformats.org/presentationml/2006/main" xmlns:r="http://schemas.openxmlformats.org/officeDocument/2006/relationships">
+  <p:cSld>
+    <p:bg>
+      <p:bgPr>
+        <a:solidFill>
+          <a:srgbClr val="091523"/>
+        </a:solidFill>
+        <a:effectLst/>
+      </p:bgPr>
+    </p:bg>
+    <p:spTree>
+      <p:nvGrpSpPr>
+        <p:cNvPr id="1" name=""/>
+        <p:cNvGrpSpPr/>
+        <p:nvPr/>
+      </p:nvGrpSpPr>
+      <p:grpSpPr/>
+      <p:sp>
+        <p:nvSpPr>
+          <p:cNvPr id="2" name="Rectangle 1"/>
+          <p:cNvSpPr/>
+          <p:nvPr/>
+        </p:nvSpPr>
+        <p:spPr>
+          <a:xfrm>
+            <a:off x="0" y="0"/>
+            <a:ext cx="12191695" cy="502920"/>
+          </a:xfrm>
+          <a:prstGeom prst="rect">
+            <a:avLst/>
+          </a:prstGeom>
+          <a:solidFill>
+            <a:srgbClr val="102238"/>
+          </a:solidFill>
+          <a:ln>
+            <a:noFill/>
+          </a:ln>
+        </p:spPr>
+        <p:style>
+          <a:lnRef idx="1">
+            <a:schemeClr val="accent1"/>
+          </a:lnRef>
+          <a:fillRef idx="3">
+            <a:schemeClr val="accent1"/>
+          </a:fillRef>
+          <a:effectRef idx="2">
+            <a:schemeClr val="accent1"/>
+          </a:effectRef>
+          <a:fontRef idx="minor">
+            <a:schemeClr val="lt1"/>
+          </a:fontRef>
+        </p:style>
+        <p:txBody>
+          <a:bodyPr rtlCol="0" anchor="ctr" lIns="228600"/>
+          <a:lstStyle/>
+          <a:p>
+            <a:pPr algn="l"/>
+            <a:r>
+              <a:rPr sz="2400" b="1">
+                <a:solidFill>
+                  <a:srgbClr val="FFFFFF"/>
+                </a:solidFill>
+                <a:latin typeface="Aptos Display"/>
+              </a:rPr>
               <a:t>Next Steps</a:t>
             </a:r>
           </a:p>
@@ -4842,7 +5942,7 @@
               </a:defRPr>
             </a:pPr>
             <a:r>
-              <a:t>AUTOSAR architecture design is slow, artifact-heavy, and split across Classic CAN and Adaptive SOME/IP worlds.</a:t>
+              <a:t>AUTOSAR design is slow, artifact-heavy, and split across Classic CAN and Adaptive SOME/IP stacks.</a:t>
             </a:r>
           </a:p>
           <a:p>
@@ -4858,7 +5958,7 @@
               </a:defRPr>
             </a:pPr>
             <a:r>
-              <a:t>Teams must move from informal requirements into structured models, communication mappings, and safety evidence under demo-time pressure.</a:t>
+              <a:t>Teams must turn informal requirements into models, mappings, and safety evidence under time pressure.</a:t>
             </a:r>
           </a:p>
           <a:p>
@@ -4874,7 +5974,7 @@
               </a:defRPr>
             </a:pPr>
             <a:r>
-              <a:t>Early architecture iterations often lack traceability, tenant isolation, or fast validation for ASIL-oriented design decisions.</a:t>
+              <a:t>Early iterations often lack fast validation, traceability, and reusable demo artifacts.</a:t>
             </a:r>
           </a:p>
           <a:p>
@@ -4890,7 +5990,7 @@
               </a:defRPr>
             </a:pPr>
             <a:r>
-              <a:t>Hackathon teams need a working pipeline that turns prompts and reference ARXML into usable artifacts, not just static documentation.</a:t>
+              <a:t>We need a working pipeline that converts intent and ARXML references into usable outputs, not just documents.</a:t>
             </a:r>
           </a:p>
         </p:txBody>
@@ -5366,7 +6466,7 @@
               </a:defRPr>
             </a:pPr>
             <a:r>
-              <a:t>Generates simplified AUTOSAR YAML from natural language requests using local reference grounding.</a:t>
+              <a:t>Natural language to AUTOSAR YAML using local grounded retrieval.</a:t>
             </a:r>
           </a:p>
           <a:p>
@@ -5382,7 +6482,7 @@
               </a:defRPr>
             </a:pPr>
             <a:r>
-              <a:t>Compiles one architecture into two outputs in the app: Adaptive ARXML and Classic ARXML.</a:t>
+              <a:t>One-click compile to both Adaptive ARXML and Classic ARXML.</a:t>
             </a:r>
           </a:p>
           <a:p>
@@ -5398,7 +6498,7 @@
               </a:defRPr>
             </a:pPr>
             <a:r>
-              <a:t>Runs safety validation with ISO 26262-style checks for structure, ASIL completeness, mappings, and communication risks.</a:t>
+              <a:t>Safety validation for structure, ASIL coverage, mappings, and communication risk.</a:t>
             </a:r>
           </a:p>
           <a:p>
@@ -5414,7 +6514,7 @@
               </a:defRPr>
             </a:pPr>
             <a:r>
-              <a:t>Supports reference ARXML upload, retrieval comparison, AI suggestions, demo HMI/telltale simulation, and tenant-scoped audit trails.</a:t>
+              <a:t>Reference ARXML upload, AI suggestions, HMI simulation, and tenant-scoped audit trails.</a:t>
             </a:r>
           </a:p>
         </p:txBody>
@@ -6365,7 +7465,7 @@
               </a:defRPr>
             </a:pPr>
             <a:r>
-              <a:t>Retrieval-Augmented Generation grounds prompts in AUTOSAR reference notes and workflow example documents instead of relying on a generic LLM answer.</a:t>
+              <a:t>RAG grounds prompts in local AUTOSAR notes and example ARXML, reducing generic LLM drift.</a:t>
             </a:r>
           </a:p>
           <a:p>
@@ -6381,7 +7481,7 @@
               </a:defRPr>
             </a:pPr>
             <a:r>
-              <a:t>The model converts broad intent into structured architecture sections: system, ECUs, services, signals, and safety.</a:t>
+              <a:t>The model converts broad intent into structured system, ECU, service, signal, and safety sections.</a:t>
             </a:r>
           </a:p>
           <a:p>
@@ -6397,7 +7497,7 @@
               </a:defRPr>
             </a:pPr>
             <a:r>
-              <a:t>An AI suggestion engine proposes safety, mapping, and deployment improvements after generation.</a:t>
+              <a:t>AI suggestions propose safety, mapping, and deployment improvements after generation.</a:t>
             </a:r>
           </a:p>
           <a:p>
@@ -6413,7 +7513,7 @@
               </a:defRPr>
             </a:pPr>
             <a:r>
-              <a:t>A lightweight ML baseline flags potentially unsafe signal-to-service mappings before compile time.</a:t>
+              <a:t>A lightweight ML baseline flags risky signal-to-service mappings before compile time.</a:t>
             </a:r>
           </a:p>
         </p:txBody>
